--- a/lecons/USA/Population Geography/USA_POP_PW03_Dependency_Ratio_and_Population_Pyramids.pptx
+++ b/lecons/USA/Population Geography/USA_POP_PW03_Dependency_Ratio_and_Population_Pyramids.pptx
@@ -6406,7 +6406,7 @@
                 <a:ea typeface="Times New Roman" pitchFamily="34" charset="-122"/>
                 <a:cs typeface="Times New Roman" pitchFamily="34" charset="-120"/>
               </a:rPr>
-              <a:t>Practical Work 3: Dependency Ratio and Population Pyramids</a:t>
+              <a:t>Practical Work 3</a:t>
             </a:r>
             <a:endParaRPr lang="en-US" sz="2600" dirty="0"/>
           </a:p>
